--- a/assets/00-agentic-sw-engineering.pptx
+++ b/assets/00-agentic-sw-engineering.pptx
@@ -2520,7 +2520,12 @@
             <p:ph type="body" sz="quarter" idx="12"/>
           </p:nvPr>
         </p:nvSpPr>
-        <p:spPr/>
+        <p:spPr>
+          <a:xfrm>
+            <a:off x="334965" y="1143000"/>
+            <a:ext cx="5856831" cy="692471"/>
+          </a:xfrm>
+        </p:spPr>
         <p:txBody>
           <a:bodyPr/>
           <a:lstStyle/>
@@ -2561,8 +2566,8 @@
         </p:nvSpPr>
         <p:spPr>
           <a:xfrm>
-            <a:off x="334964" y="973612"/>
-            <a:ext cx="5108907" cy="2939171"/>
+            <a:off x="334964" y="1908623"/>
+            <a:ext cx="5108907" cy="1188720"/>
           </a:xfrm>
         </p:spPr>
         <p:txBody>
@@ -2571,14 +2576,14 @@
           <a:p>
             <a:pPr>
               <a:lnSpc>
-                <a:spcPct val="100000"/>
+                <a:spcPct val="110000"/>
               </a:lnSpc>
               <a:spcBef>
                 <a:spcPts val="0"/>
               </a:spcBef>
             </a:pPr>
             <a:r>
-              <a:rPr lang="en-GB">
+              <a:rPr lang="en-GB" sz="3200">
                 <a:solidFill>
                   <a:srgbClr val="04282E"/>
                 </a:solidFill>
@@ -2589,14 +2594,14 @@
           <a:p>
             <a:pPr>
               <a:lnSpc>
-                <a:spcPct val="100000"/>
+                <a:spcPct val="110000"/>
               </a:lnSpc>
               <a:spcBef>
                 <a:spcPts val="0"/>
               </a:spcBef>
             </a:pPr>
             <a:r>
-              <a:rPr lang="en-GB">
+              <a:rPr lang="en-GB" sz="3200">
                 <a:solidFill>
                   <a:srgbClr val="04282E"/>
                 </a:solidFill>
@@ -2607,7 +2612,7 @@
           <a:p>
             <a:pPr>
               <a:lnSpc>
-                <a:spcPct val="100000"/>
+                <a:spcPct val="110000"/>
               </a:lnSpc>
               <a:spcBef>
                 <a:spcPts val="0"/>
@@ -2684,7 +2689,7 @@
           <a:lstStyle/>
           <a:p>
             <a:r>
-              <a:rPr lang="en-GB" b="1">
+              <a:rPr lang="en-GB" b="0" sz="1050">
                 <a:solidFill>
                   <a:schemeClr val="tx1"/>
                 </a:solidFill>
@@ -2692,14 +2697,32 @@
               </a:rPr>
               <a:t>www.flane.de</a:t>
             </a:r>
-            <a:endParaRPr lang="en-GB" b="1">
+            <a:r>
+              <a:rPr lang="en-GB" b="0" sz="1050">
+                <a:solidFill>
+                  <a:schemeClr val="tx1"/>
+                </a:solidFill>
+                <a:latin typeface="IBM Plex Sans"/>
+              </a:rPr>
+              <a:t> | </a:t>
+            </a:r>
+            <a:r>
+              <a:rPr lang="en-GB" b="0" sz="1050">
+                <a:solidFill>
+                  <a:schemeClr val="tx1"/>
+                </a:solidFill>
+                <a:latin typeface="IBM Plex Sans"/>
+              </a:rPr>
+              <a:t>© 2026 Fast Lane Institute for Knowledge Transfer GmbH</a:t>
+            </a:r>
+            <a:endParaRPr lang="en-GB" b="0" sz="1050">
               <a:solidFill>
                 <a:schemeClr val="tx1"/>
               </a:solidFill>
             </a:endParaRPr>
           </a:p>
           <a:p>
-            <a:endParaRPr lang="en-HR">
+            <a:endParaRPr lang="en-HR" sz="1050" b="0">
               <a:solidFill>
                 <a:schemeClr val="tx1"/>
               </a:solidFill>
@@ -3574,7 +3597,7 @@
                 <a:ea typeface="Poppins" pitchFamily="34" charset="-122"/>
                 <a:cs typeface="Poppins" pitchFamily="34" charset="-120"/>
               </a:rPr>
-              <a:t>Copilot, Foundry and multi-agent systems with governance</a:t>
+              <a:t>Governed multi-agent systems on Microsoft Copilot and Foundry</a:t>
             </a:r>
             <a:endParaRPr lang="en-US" sz="1200" dirty="0"/>
           </a:p>
@@ -3692,7 +3715,7 @@
                 <a:ea typeface="Poppins" pitchFamily="34" charset="-122"/>
                 <a:cs typeface="Poppins" pitchFamily="34" charset="-120"/>
               </a:rPr>
-              <a:t>State of art harness for Claude Code and GitHub Copilot</a:t>
+              <a:t>Harness architecture for Claude Code and GitHub Copilot</a:t>
             </a:r>
             <a:endParaRPr lang="en-US" sz="1200" dirty="0"/>
           </a:p>
@@ -3766,7 +3789,7 @@
                 <a:ea typeface="Montserrat" pitchFamily="34" charset="-122"/>
                 <a:cs typeface="Montserrat" pitchFamily="34" charset="-120"/>
               </a:rPr>
-              <a:t>Training &amp; Team Enablement</a:t>
+              <a:t>Team Enablement</a:t>
             </a:r>
             <a:endParaRPr lang="en-US" sz="1300" dirty="0"/>
           </a:p>
@@ -3810,7 +3833,7 @@
                 <a:ea typeface="Poppins" pitchFamily="34" charset="-122"/>
                 <a:cs typeface="Poppins" pitchFamily="34" charset="-120"/>
               </a:rPr>
-              <a:t>Master classes, custom course production and AI-tutored learning</a:t>
+              <a:t>AI driven content production and delivery</a:t>
             </a:r>
             <a:endParaRPr lang="en-US" sz="1200" dirty="0"/>
           </a:p>

--- a/assets/00-agentic-sw-engineering.pptx
+++ b/assets/00-agentic-sw-engineering.pptx
@@ -3361,7 +3361,7 @@
                 <a:ea typeface="Poppins" pitchFamily="34" charset="-122"/>
                 <a:cs typeface="Poppins" pitchFamily="34" charset="-120"/>
               </a:rPr>
-              <a:t>For Austrian SMEs, software teams and enterprise programmes.</a:t>
+              <a:t>Full stack, from enterprise software to agentic AI. Since 1996</a:t>
             </a:r>
             <a:endParaRPr lang="en-US" sz="1400" dirty="0"/>
           </a:p>
